--- a/decks/combined-cells/combined-cells_ch5_diffusion.pptx
+++ b/decks/combined-cells/combined-cells_ch5_diffusion.pptx
@@ -124,30 +124,30 @@
   <p:extLst>
     <p:ext uri="{521415D9-36F7-43E2-AB2F-B90AF26B5E84}">
       <p14:sectionLst xmlns:p14="http://schemas.microsoft.com/office/powerpoint/2010/main">
-        <p14:section name="Opening" id="{6093a71d-e114-d1cc-59d6-feddd2bb42ec}">
+        <p14:section name="Opening" id="{5b7995ea-1f7d-cae6-c199-0f6e293516e2}">
           <p14:sldIdLst>
             <p14:sldId id="256"/>
           </p14:sldIdLst>
         </p14:section>
-        <p14:section name="Gate" id="{5dead48b-bf01-69df-491e-531040566243}">
+        <p14:section name="Gate" id="{daff7018-12df-1d4e-0cd7-a67bd14a7eaa}">
           <p14:sldIdLst>
             <p14:sldId id="257"/>
             <p14:sldId id="258"/>
           </p14:sldIdLst>
         </p14:section>
-        <p14:section name="Pre-teach" id="{6b2dd984-8fc7-31d4-2779-773ef06452ed}">
+        <p14:section name="Pre-teach" id="{7c31f608-6e9e-2615-d47d-03bc86c6e350}">
           <p14:sldIdLst>
             <p14:sldId id="259"/>
             <p14:sldId id="260"/>
           </p14:sldIdLst>
         </p14:section>
-        <p14:section name="Read-along" id="{f8fa2b9f-0c5f-0e50-88b7-7601ca7308aa}">
+        <p14:section name="Read-along" id="{ccf111e5-b1ee-fa31-0196-ed07a84e93ff}">
           <p14:sldIdLst>
             <p14:sldId id="261"/>
             <p14:sldId id="262"/>
           </p14:sldIdLst>
         </p14:section>
-        <p14:section name="Teach" id="{db9c0569-c2a9-3dfc-452c-f73ac9c01a5d}">
+        <p14:section name="Teach" id="{76480e8a-9490-628a-d601-2f8ed3b84c6c}">
           <p14:sldIdLst>
             <p14:sldId id="263"/>
             <p14:sldId id="264"/>
@@ -155,19 +155,19 @@
             <p14:sldId id="266"/>
           </p14:sldIdLst>
         </p14:section>
-        <p14:section name="Routes" id="{dacac812-54b5-3fe8-f111-4349f9dea97f}">
+        <p14:section name="Routes" id="{d1f0b297-b720-c013-9a23-fcbd790d7843}">
           <p14:sldIdLst>
             <p14:sldId id="267"/>
             <p14:sldId id="268"/>
             <p14:sldId id="269"/>
           </p14:sldIdLst>
         </p14:section>
-        <p14:section name="Close" id="{9bd895de-066b-f2df-524d-8703cde81a06}">
+        <p14:section name="Close" id="{6fdb3e1a-49e0-6d6e-8d9c-c27a5387d06a}">
           <p14:sldIdLst>
             <p14:sldId id="270"/>
           </p14:sldIdLst>
         </p14:section>
-        <p14:section name="Answers" id="{647e2987-3d57-1386-f9f9-3597bf47162f}">
+        <p14:section name="Answers" id="{1035a6ff-9692-590b-4466-b5a2da691133}">
           <p14:sldIdLst>
             <p14:sldId id="271"/>
             <p14:sldId id="272"/>
@@ -1137,7 +1137,7 @@
               <a:rPr lang="en-US" dirty="0"/>
               <a:t>Exit ticket — individual, silent, on a slip or mini-whiteboard. Recall before help: no notes, no lanes, no hints. Collect before pupils leave.
 Question: Which sentence describes diffusion?
-Answer: D   the net movement of particles from a higher concentration to a lower concentration. Diffusion is the net movement of particles down a concentration gradient, from high to low, and it needs no energy from the cell.
+Answer: C   the net movement of particles from a higher concentration to a lower concentration. Diffusion is the net movement of particles down a concentration gradient, from high to low, and it needs no energy from the cell.
 Source of this question: gate item 1 re-asked (options rotated) — this chapter has no third quick-check module.
 The ebook also holds task 3, "Three ways to speed it up", for homework or the next lesson's do now.
 Sort the slips: correct → ready to move on; incorrect → start next lesson in the pre-teach group, with the read-along and the Support lane. Same destination next time.</a:t>
@@ -1411,7 +1411,7 @@
             <a:r>
               <a:rPr lang="en-US" dirty="0"/>
               <a:t>Answers — exit ticket: Exit ticket. Reveal the answer; pupils mark their own work in a different colour, then read the "why" together. Same destination for every lane, so one answer serves the whole class.
-Answer: D   the net movement of particles from a higher concentration to a lower concentration
+Answer: C   the net movement of particles from a higher concentration to a lower concentration
 Why: Diffusion is the net movement of particles down a concentration gradient, from high to low, and it needs no energy from the cell.
 Ask a Support pupil to explain one step, and a Stretch pupil to share their extension.</a:t>
             </a:r>
@@ -1502,7 +1502,7 @@
             <a:r>
               <a:rPr lang="en-US" dirty="0"/>
               <a:t>Do now — retrieval. Silent, no notes, no help: recall comes before any support. Give about four minutes.
-1. Which sentence describes diffusion?  →  A   the net movement of particles from a higher concentration to a lower concentration
+1. Which sentence describes diffusion?  →  D   the net movement of particles from a higher concentration to a lower concentration
 2. A cube has sides of 3 cm. Calculate its total surface area in cm².  →  54 cm²
 3. Increasing the temperature ___ the rate of diffusion.  →  increases
 Circulate: who gets 3/3 (Stretch route), 2/3 (Core), 0–1 (Support)? Use this to route pupils later in the lesson.</a:t>
@@ -1594,7 +1594,7 @@
             <a:r>
               <a:rPr lang="en-US" dirty="0"/>
               <a:t>Answers — pupils mark their own in a different colour, then hands up for 3/3, 2/3, 1/3.
-1. A   the net movement of particles from a higher concentration to a lower concentration. Diffusion is the net movement of particles down a concentration gradient, from high to low, and it needs no energy from the cell.
+1. D   the net movement of particles from a higher concentration to a lower concentration. Diffusion is the net movement of particles down a concentration gradient, from high to low, and it needs no energy from the cell.
 2. 54 cm². A cube has 6 faces, each 3 × 3 = 9 cm², so the total surface area is 6 × 9 = 54 cm² (exact).
 3. increases. Warmer particles have more kinetic energy and move faster, so they spread out faster.
 Say the route each score points to: 3/3 Stretch, 2/3 Core, 0–1 Support. Pupils may choose to move up.</a:t>
@@ -6791,7 +6791,7 @@
                 <a:ea typeface="Calibri" pitchFamily="34" charset="-122"/>
                 <a:cs typeface="Calibri" pitchFamily="34" charset="-120"/>
               </a:rPr>
-              <a:t>a higher concentration of oxygen outside the cell</a:t>
+              <a:t>a higher temperature</a:t>
             </a:r>
             <a:endParaRPr lang="en-US" sz="2600" dirty="0"/>
           </a:p>
@@ -6828,7 +6828,7 @@
                 <a:ea typeface="Calibri" pitchFamily="34" charset="-122"/>
                 <a:cs typeface="Calibri" pitchFamily="34" charset="-120"/>
               </a:rPr>
-              <a:t>a higher temperature</a:t>
+              <a:t>a higher concentration of oxygen outside the cell</a:t>
             </a:r>
             <a:endParaRPr lang="en-US" sz="2600" dirty="0"/>
           </a:p>
@@ -8232,7 +8232,7 @@
                 <a:ea typeface="Calibri" pitchFamily="34" charset="-122"/>
                 <a:cs typeface="Calibri" pitchFamily="34" charset="-120"/>
               </a:rPr>
-              <a:t>the movement of water only, through a partially permeable membrane</a:t>
+              <a:t>the movement of particles against a concentration gradient using energy</a:t>
             </a:r>
             <a:endParaRPr lang="en-US" sz="2000" dirty="0"/>
           </a:p>
@@ -8269,7 +8269,7 @@
                 <a:ea typeface="Calibri" pitchFamily="34" charset="-122"/>
                 <a:cs typeface="Calibri" pitchFamily="34" charset="-120"/>
               </a:rPr>
-              <a:t>the movement of particles against a concentration gradient using energy</a:t>
+              <a:t>the movement of particles from a lower concentration to a higher concentration without energy</a:t>
             </a:r>
             <a:endParaRPr lang="en-US" sz="2000" dirty="0"/>
           </a:p>
@@ -8306,7 +8306,7 @@
                 <a:ea typeface="Calibri" pitchFamily="34" charset="-122"/>
                 <a:cs typeface="Calibri" pitchFamily="34" charset="-120"/>
               </a:rPr>
-              <a:t>the movement of particles from a lower concentration to a higher concentration without energy</a:t>
+              <a:t>the net movement of particles from a higher concentration to a lower concentration</a:t>
             </a:r>
             <a:endParaRPr lang="en-US" sz="2000" dirty="0"/>
           </a:p>
@@ -8343,7 +8343,7 @@
                 <a:ea typeface="Calibri" pitchFamily="34" charset="-122"/>
                 <a:cs typeface="Calibri" pitchFamily="34" charset="-120"/>
               </a:rPr>
-              <a:t>the net movement of particles from a higher concentration to a lower concentration</a:t>
+              <a:t>the movement of water only, through a partially permeable membrane</a:t>
             </a:r>
             <a:endParaRPr lang="en-US" sz="2000" dirty="0"/>
           </a:p>
@@ -9666,7 +9666,7 @@
                 <a:ea typeface="Cambria" pitchFamily="34" charset="-122"/>
                 <a:cs typeface="Cambria" pitchFamily="34" charset="-120"/>
               </a:rPr>
-              <a:t>D   the net movement of particles from a higher concentration to a lower concentration</a:t>
+              <a:t>C   the net movement of particles from a higher concentration to a lower concentration</a:t>
             </a:r>
             <a:endParaRPr lang="en-US" sz="1800" dirty="0"/>
           </a:p>
@@ -10200,7 +10200,7 @@
                 <a:ea typeface="Calibri" pitchFamily="34" charset="-122"/>
                 <a:cs typeface="Calibri" pitchFamily="34" charset="-120"/>
               </a:rPr>
-              <a:t>the net movement of particles from a higher concentration to a lower concentration</a:t>
+              <a:t>the movement of water only, through a partially permeable membrane</a:t>
             </a:r>
             <a:endParaRPr lang="en-US" sz="1800" dirty="0"/>
           </a:p>
@@ -10237,7 +10237,7 @@
                 <a:ea typeface="Calibri" pitchFamily="34" charset="-122"/>
                 <a:cs typeface="Calibri" pitchFamily="34" charset="-120"/>
               </a:rPr>
-              <a:t>the movement of water only, through a partially permeable membrane</a:t>
+              <a:t>the movement of particles against a concentration gradient using energy</a:t>
             </a:r>
             <a:endParaRPr lang="en-US" sz="1800" dirty="0"/>
           </a:p>
@@ -10274,7 +10274,7 @@
                 <a:ea typeface="Calibri" pitchFamily="34" charset="-122"/>
                 <a:cs typeface="Calibri" pitchFamily="34" charset="-120"/>
               </a:rPr>
-              <a:t>the movement of particles against a concentration gradient using energy</a:t>
+              <a:t>the movement of particles from a lower concentration to a higher concentration without energy</a:t>
             </a:r>
             <a:endParaRPr lang="en-US" sz="1800" dirty="0"/>
           </a:p>
@@ -10311,7 +10311,7 @@
                 <a:ea typeface="Calibri" pitchFamily="34" charset="-122"/>
                 <a:cs typeface="Calibri" pitchFamily="34" charset="-120"/>
               </a:rPr>
-              <a:t>the movement of particles from a lower concentration to a higher concentration without energy</a:t>
+              <a:t>the net movement of particles from a higher concentration to a lower concentration</a:t>
             </a:r>
             <a:endParaRPr lang="en-US" sz="1800" dirty="0"/>
           </a:p>
@@ -11108,7 +11108,7 @@
                 <a:ea typeface="Calibri" pitchFamily="34" charset="-122"/>
                 <a:cs typeface="Calibri" pitchFamily="34" charset="-120"/>
               </a:rPr>
-              <a:t>A   the net movement of particles from a higher concentration to a lower concentration</a:t>
+              <a:t>D   the net movement of particles from a higher concentration to a lower concentration</a:t>
             </a:r>
             <a:endParaRPr lang="en-US" sz="2200" dirty="0"/>
           </a:p>

--- a/decks/combined-cells/combined-cells_ch5_diffusion.pptx
+++ b/decks/combined-cells/combined-cells_ch5_diffusion.pptx
@@ -124,30 +124,30 @@
   <p:extLst>
     <p:ext uri="{521415D9-36F7-43E2-AB2F-B90AF26B5E84}">
       <p14:sectionLst xmlns:p14="http://schemas.microsoft.com/office/powerpoint/2010/main">
-        <p14:section name="Opening" id="{5b7995ea-1f7d-cae6-c199-0f6e293516e2}">
+        <p14:section name="Opening" id="{eb1e09c6-0c64-fca5-470d-7b362f72cf52}">
           <p14:sldIdLst>
             <p14:sldId id="256"/>
           </p14:sldIdLst>
         </p14:section>
-        <p14:section name="Gate" id="{daff7018-12df-1d4e-0cd7-a67bd14a7eaa}">
+        <p14:section name="Gate" id="{b0893954-3faf-041b-a300-57dc4895e55a}">
           <p14:sldIdLst>
             <p14:sldId id="257"/>
             <p14:sldId id="258"/>
           </p14:sldIdLst>
         </p14:section>
-        <p14:section name="Pre-teach" id="{7c31f608-6e9e-2615-d47d-03bc86c6e350}">
+        <p14:section name="Pre-teach" id="{c78eff48-720f-bf57-db51-1ea72e3e00dc}">
           <p14:sldIdLst>
             <p14:sldId id="259"/>
             <p14:sldId id="260"/>
           </p14:sldIdLst>
         </p14:section>
-        <p14:section name="Read-along" id="{ccf111e5-b1ee-fa31-0196-ed07a84e93ff}">
+        <p14:section name="Read-along" id="{83635180-105c-0c97-927c-381a7aacaa55}">
           <p14:sldIdLst>
             <p14:sldId id="261"/>
             <p14:sldId id="262"/>
           </p14:sldIdLst>
         </p14:section>
-        <p14:section name="Teach" id="{76480e8a-9490-628a-d601-2f8ed3b84c6c}">
+        <p14:section name="Teach" id="{ce19bf26-304d-5f73-39e5-a3e0efe49676}">
           <p14:sldIdLst>
             <p14:sldId id="263"/>
             <p14:sldId id="264"/>
@@ -155,19 +155,19 @@
             <p14:sldId id="266"/>
           </p14:sldIdLst>
         </p14:section>
-        <p14:section name="Routes" id="{d1f0b297-b720-c013-9a23-fcbd790d7843}">
+        <p14:section name="Routes" id="{4c2ed05a-7a1b-abd8-430a-8a86369a405d}">
           <p14:sldIdLst>
             <p14:sldId id="267"/>
             <p14:sldId id="268"/>
             <p14:sldId id="269"/>
           </p14:sldIdLst>
         </p14:section>
-        <p14:section name="Close" id="{6fdb3e1a-49e0-6d6e-8d9c-c27a5387d06a}">
+        <p14:section name="Close" id="{600ad326-2692-48e5-a173-82b82f66432a}">
           <p14:sldIdLst>
             <p14:sldId id="270"/>
           </p14:sldIdLst>
         </p14:section>
-        <p14:section name="Answers" id="{1035a6ff-9692-590b-4466-b5a2da691133}">
+        <p14:section name="Answers" id="{da7954ef-8829-1658-cda3-744cfe0f0e8d}">
           <p14:sldIdLst>
             <p14:sldId id="271"/>
             <p14:sldId id="272"/>
